--- a/classes/parte-0-fundamentos-y-prerrequisitos/003-frameworks-de-seguridad-nist-csf-iso-27001-mitre-att-ck-y-diamond-model/clase-003-presentacion.pptx
+++ b/classes/parte-0-fundamentos-y-prerrequisitos/003-frameworks-de-seguridad-nist-csf-iso-27001-mitre-att-ck-y-diamond-model/clase-003-presentacion.pptx
@@ -17,6 +17,11 @@
     <p:sldId id="265" r:id="rId16"/>
     <p:sldId id="266" r:id="rId17"/>
     <p:sldId id="267" r:id="rId18"/>
+    <p:sldId id="268" r:id="rId19"/>
+    <p:sldId id="269" r:id="rId20"/>
+    <p:sldId id="270" r:id="rId21"/>
+    <p:sldId id="271" r:id="rId22"/>
+    <p:sldId id="272" r:id="rId23"/>
   </p:sldIdLst>
   <p:sldSz cx="9144000" cy="6858000" type="screen4x3"/>
   <p:notesSz cx="6858000" cy="9144000"/>
@@ -3198,7 +3203,7 @@
                   <a:srgbClr val="0B3D2E"/>
                 </a:solidFill>
               </a:rPr>
-              <a:t>⚠️ Errores comunes</a:t>
+              <a:t>✍️ Ejercicios</a:t>
             </a:r>
           </a:p>
         </p:txBody>
@@ -3236,67 +3241,97 @@
                   <a:srgbClr val="22282E"/>
                 </a:solidFill>
               </a:rPr>
-              <a:t>•  Usar ATT&amp;CK como checklist de cumplimiento — ATT&amp;CK describe comportamiento adversario, no es una lista de controles a "tachar".</a:t>
-            </a:r>
-          </a:p>
-          <a:p>
-            <a:pPr>
-              <a:spcAft>
-                <a:spcPts val="600"/>
-              </a:spcAft>
-            </a:pPr>
-            <a:r>
-              <a:rPr sz="1500">
-                <a:solidFill>
-                  <a:srgbClr val="22282E"/>
-                </a:solidFill>
-              </a:rPr>
-              <a:t>•  Confundir ISO 27001 con 27002 — 27001 es el estándar certificable del SGSI; 27002 es la guía de controles.</a:t>
-            </a:r>
-          </a:p>
-          <a:p>
-            <a:pPr>
-              <a:spcAft>
-                <a:spcPts val="600"/>
-              </a:spcAft>
-            </a:pPr>
-            <a:r>
-              <a:rPr sz="1500">
-                <a:solidFill>
-                  <a:srgbClr val="22282E"/>
-                </a:solidFill>
-              </a:rPr>
-              <a:t>•  Certificar por certificar — El cumplimiento sin gestión de riesgo real deja huecos; la seguridad es continua.</a:t>
-            </a:r>
-          </a:p>
-          <a:p>
-            <a:pPr>
-              <a:spcAft>
-                <a:spcPts val="600"/>
-              </a:spcAft>
-            </a:pPr>
-            <a:r>
-              <a:rPr sz="1500">
-                <a:solidFill>
-                  <a:srgbClr val="22282E"/>
-                </a:solidFill>
-              </a:rPr>
-              <a:t>•  Elegir un solo framework para todo — Los de gestión (CSF/ISO) y los adversarios (ATT&amp;CK/Diamond) resuelven problemas distintos.</a:t>
-            </a:r>
-          </a:p>
-          <a:p>
-            <a:pPr>
-              <a:spcAft>
-                <a:spcPts val="600"/>
-              </a:spcAft>
-            </a:pPr>
-            <a:r>
-              <a:rPr sz="1500">
-                <a:solidFill>
-                  <a:srgbClr val="22282E"/>
-                </a:solidFill>
-              </a:rPr>
-              <a:t>•  Ignorar la nueva función Govern — Gobernanza y contexto son ahora explícitos en CSF 2.0; no la omitas.</a:t>
+              <a:t>•  ¿Qué función nueva añadió el CSF 2.0 respecto a la 1.1 y qué problema concreto de gobernanza resuelve?</a:t>
+            </a:r>
+          </a:p>
+          <a:p>
+            <a:pPr>
+              <a:spcAft>
+                <a:spcPts val="600"/>
+              </a:spcAft>
+            </a:pPr>
+            <a:r>
+              <a:rPr sz="1500">
+                <a:solidFill>
+                  <a:srgbClr val="22282E"/>
+                </a:solidFill>
+              </a:rPr>
+              <a:t>•  Explica con un ejemplo la diferencia entre una táctica y una técnica en ATT&amp;CK, citando un ID real.</a:t>
+            </a:r>
+          </a:p>
+          <a:p>
+            <a:pPr>
+              <a:spcAft>
+                <a:spcPts val="600"/>
+              </a:spcAft>
+            </a:pPr>
+            <a:r>
+              <a:rPr sz="1500">
+                <a:solidFill>
+                  <a:srgbClr val="22282E"/>
+                </a:solidFill>
+              </a:rPr>
+              <a:t>•  Da tres controles del Anexo A y clasifícalos en su tema (organizacional, personas, físico o tecnológico).</a:t>
+            </a:r>
+          </a:p>
+          <a:p>
+            <a:pPr>
+              <a:spcAft>
+                <a:spcPts val="600"/>
+              </a:spcAft>
+            </a:pPr>
+            <a:r>
+              <a:rPr sz="1500">
+                <a:solidFill>
+                  <a:srgbClr val="22282E"/>
+                </a:solidFill>
+              </a:rPr>
+              <a:t>•  Analiza un incidente sencillo con el Diamond Model y muestra un pivote entre dos vértices distintos.</a:t>
+            </a:r>
+          </a:p>
+          <a:p>
+            <a:pPr>
+              <a:spcAft>
+                <a:spcPts val="600"/>
+              </a:spcAft>
+            </a:pPr>
+            <a:r>
+              <a:rPr sz="1500">
+                <a:solidFill>
+                  <a:srgbClr val="22282E"/>
+                </a:solidFill>
+              </a:rPr>
+              <a:t>•  Argumenta por qué "cumplir ISO 27001" no equivale a "estar seguro" con un contraejemplo.</a:t>
+            </a:r>
+          </a:p>
+          <a:p>
+            <a:pPr>
+              <a:spcAft>
+                <a:spcPts val="600"/>
+              </a:spcAft>
+            </a:pPr>
+            <a:r>
+              <a:rPr sz="1500">
+                <a:solidFill>
+                  <a:srgbClr val="22282E"/>
+                </a:solidFill>
+              </a:rPr>
+              <a:t>•  Mapea una técnica ATT&amp;CK a la función del CSF que ayudaría a mitigarla y a un control del Anexo A.</a:t>
+            </a:r>
+          </a:p>
+          <a:p>
+            <a:pPr>
+              <a:spcAft>
+                <a:spcPts val="600"/>
+              </a:spcAft>
+            </a:pPr>
+            <a:r>
+              <a:rPr sz="1500">
+                <a:solidFill>
+                  <a:srgbClr val="22282E"/>
+                </a:solidFill>
+              </a:rPr>
+              <a:t>•  Explica por qué un programa que solo usa ATT&amp;CK, sin marco de gestión, deja huecos, y qué aporta CSF que ATT&amp;CK no.</a:t>
             </a:r>
           </a:p>
         </p:txBody>
@@ -3347,7 +3382,7 @@
                   <a:srgbClr val="0B3D2E"/>
                 </a:solidFill>
               </a:rPr>
-              <a:t>❓ Preguntas frecuentes</a:t>
+              <a:t>📝 Reto verificable</a:t>
             </a:r>
           </a:p>
         </p:txBody>
@@ -3385,52 +3420,22 @@
                   <a:srgbClr val="22282E"/>
                 </a:solidFill>
               </a:rPr>
-              <a:t>•  ❓ ¿NIST CSF es obligatorio? No, es voluntario, pero se ha vuelto un lenguaje común, y en muchos sectores/países es de facto exigido por contratos o reguladores.</a:t>
-            </a:r>
-          </a:p>
-          <a:p>
-            <a:pPr>
-              <a:spcAft>
-                <a:spcPts val="600"/>
-              </a:spcAft>
-            </a:pPr>
-            <a:r>
-              <a:rPr sz="1500">
-                <a:solidFill>
-                  <a:srgbClr val="22282E"/>
-                </a:solidFill>
-              </a:rPr>
-              <a:t>•  ❓ ¿ATT&amp;CK sustituye a la Kill Chain? No; ATT&amp;CK detalla técnicas y la Kill Chain da la vista por fases. Se usan juntas.</a:t>
-            </a:r>
-          </a:p>
-          <a:p>
-            <a:pPr>
-              <a:spcAft>
-                <a:spcPts val="600"/>
-              </a:spcAft>
-            </a:pPr>
-            <a:r>
-              <a:rPr sz="1500">
-                <a:solidFill>
-                  <a:srgbClr val="22282E"/>
-                </a:solidFill>
-              </a:rPr>
-              <a:t>•  ❓ ¿Puedo usar solo ATT&amp;CK sin marcos de gestión? Para operaciones defensivas sí ayuda, pero sin CSF/ISO faltaría la capa de gobernanza, riesgo y cumplimiento.</a:t>
-            </a:r>
-          </a:p>
-          <a:p>
-            <a:pPr>
-              <a:spcAft>
-                <a:spcPts val="600"/>
-              </a:spcAft>
-            </a:pPr>
-            <a:r>
-              <a:rPr sz="1500">
-                <a:solidFill>
-                  <a:srgbClr val="22282E"/>
-                </a:solidFill>
-              </a:rPr>
-              <a:t>•  ❓ ¿El Diamond Model es solo para forense? Es útil en análisis de intrusiones y threat intelligence, no solo forense; ayuda a pivotar y correlacionar campañas.</a:t>
+              <a:t>•  Produce un documento que integre los cuatro marcos sobre un mismo escenario: (1) un perfil CSF con estado actual y objetivo para las 6 funciones, (2) una selección justificada de 8 controles del…</a:t>
+            </a:r>
+          </a:p>
+          <a:p>
+            <a:pPr>
+              <a:spcAft>
+                <a:spcPts val="600"/>
+              </a:spcAft>
+            </a:pPr>
+            <a:r>
+              <a:rPr sz="1500">
+                <a:solidFill>
+                  <a:srgbClr val="22282E"/>
+                </a:solidFill>
+              </a:rPr>
+              <a:t>•  Criterio de aceptación: el JSON del Navigator carga sin errores en la herramienta oficial, cada control ISO se vincula a un riesgo concreto, y cada técnica ATT&amp;CK se conecta con al menos una función…</a:t>
             </a:r>
           </a:p>
         </p:txBody>
@@ -3481,7 +3486,7 @@
                   <a:srgbClr val="0B3D2E"/>
                 </a:solidFill>
               </a:rPr>
-              <a:t>🔗 Referencias</a:t>
+              <a:t>⚠️ Errores comunes</a:t>
             </a:r>
           </a:p>
         </p:txBody>
@@ -3519,7 +3524,320 @@
                   <a:srgbClr val="22282E"/>
                 </a:solidFill>
               </a:rPr>
-              <a:t>•  NIST CSF 2.0 — &lt;https://www.nist.gov/cyberframework&gt;</a:t>
+              <a:t>•  Usar ATT&amp;CK como checklist de cumplimiento — ATT&amp;CK describe comportamiento adversario, no es una lista de controles a "tachar". Úsala para razonar sobre cobertura.</a:t>
+            </a:r>
+          </a:p>
+          <a:p>
+            <a:pPr>
+              <a:spcAft>
+                <a:spcPts val="600"/>
+              </a:spcAft>
+            </a:pPr>
+            <a:r>
+              <a:rPr sz="1500">
+                <a:solidFill>
+                  <a:srgbClr val="22282E"/>
+                </a:solidFill>
+              </a:rPr>
+              <a:t>•  Confundir ISO 27001 con 27002 — 27001 es el estándar certificable del SGSI; 27002 es la guía detallada de los controles del Anexo A.</a:t>
+            </a:r>
+          </a:p>
+          <a:p>
+            <a:pPr>
+              <a:spcAft>
+                <a:spcPts val="600"/>
+              </a:spcAft>
+            </a:pPr>
+            <a:r>
+              <a:rPr sz="1500">
+                <a:solidFill>
+                  <a:srgbClr val="22282E"/>
+                </a:solidFill>
+              </a:rPr>
+              <a:t>•  Certificar por certificar — El cumplimiento sin gestión de riesgo real deja huecos; la seguridad es un proceso continuo, no un sello.</a:t>
+            </a:r>
+          </a:p>
+          <a:p>
+            <a:pPr>
+              <a:spcAft>
+                <a:spcPts val="600"/>
+              </a:spcAft>
+            </a:pPr>
+            <a:r>
+              <a:rPr sz="1500">
+                <a:solidFill>
+                  <a:srgbClr val="22282E"/>
+                </a:solidFill>
+              </a:rPr>
+              <a:t>•  Elegir un solo framework para todo — Los de gestión (CSF/ISO) y los adversarios (ATT&amp;CK/Diamond) resuelven problemas distintos; combínalos.</a:t>
+            </a:r>
+          </a:p>
+          <a:p>
+            <a:pPr>
+              <a:spcAft>
+                <a:spcPts val="600"/>
+              </a:spcAft>
+            </a:pPr>
+            <a:r>
+              <a:rPr sz="1500">
+                <a:solidFill>
+                  <a:srgbClr val="22282E"/>
+                </a:solidFill>
+              </a:rPr>
+              <a:t>•  Ignorar la nueva función Govern — Gobernanza y contexto son ahora explícitos en el CSF 2.0; omitirla deja el resto sin dirección.</a:t>
+            </a:r>
+          </a:p>
+          <a:p>
+            <a:pPr>
+              <a:spcAft>
+                <a:spcPts val="600"/>
+              </a:spcAft>
+            </a:pPr>
+            <a:r>
+              <a:rPr sz="1500">
+                <a:solidFill>
+                  <a:srgbClr val="22282E"/>
+                </a:solidFill>
+              </a:rPr>
+              <a:t>•  Aplicar los 93 controles del Anexo A en bloque — Se seleccionan según riesgo y se justifican en la SoA; aplicarlos todos sin criterio malgasta recursos.</a:t>
+            </a:r>
+          </a:p>
+        </p:txBody>
+      </p:sp>
+    </p:spTree>
+  </p:cSld>
+  <p:clrMapOvr>
+    <a:masterClrMapping/>
+  </p:clrMapOvr>
+</p:sld>
+</file>
+
+<file path=ppt/slides/slide13.xml><?xml version="1.0" encoding="utf-8"?>
+<p:sld xmlns:a="http://schemas.openxmlformats.org/drawingml/2006/main" xmlns:p="http://schemas.openxmlformats.org/presentationml/2006/main" xmlns:r="http://schemas.openxmlformats.org/officeDocument/2006/relationships">
+  <p:cSld>
+    <p:spTree>
+      <p:nvGrpSpPr>
+        <p:cNvPr id="1" name=""/>
+        <p:cNvGrpSpPr/>
+        <p:nvPr/>
+      </p:nvGrpSpPr>
+      <p:grpSpPr/>
+      <p:sp>
+        <p:nvSpPr>
+          <p:cNvPr id="2" name="TextBox 1"/>
+          <p:cNvSpPr txBox="1"/>
+          <p:nvPr/>
+        </p:nvSpPr>
+        <p:spPr>
+          <a:xfrm>
+            <a:off x="457200" y="320040"/>
+            <a:ext cx="8229600" cy="822960"/>
+          </a:xfrm>
+          <a:prstGeom prst="rect">
+            <a:avLst/>
+          </a:prstGeom>
+          <a:noFill/>
+        </p:spPr>
+        <p:txBody>
+          <a:bodyPr wrap="square">
+            <a:spAutoFit/>
+          </a:bodyPr>
+          <a:lstStyle/>
+          <a:p>
+            <a:r>
+              <a:rPr sz="2600" b="1">
+                <a:solidFill>
+                  <a:srgbClr val="0B3D2E"/>
+                </a:solidFill>
+              </a:rPr>
+              <a:t>❓ Preguntas frecuentes</a:t>
+            </a:r>
+          </a:p>
+        </p:txBody>
+      </p:sp>
+      <p:sp>
+        <p:nvSpPr>
+          <p:cNvPr id="3" name="TextBox 2"/>
+          <p:cNvSpPr txBox="1"/>
+          <p:nvPr/>
+        </p:nvSpPr>
+        <p:spPr>
+          <a:xfrm>
+            <a:off x="457200" y="1280160"/>
+            <a:ext cx="8229600" cy="4937760"/>
+          </a:xfrm>
+          <a:prstGeom prst="rect">
+            <a:avLst/>
+          </a:prstGeom>
+          <a:noFill/>
+        </p:spPr>
+        <p:txBody>
+          <a:bodyPr wrap="square">
+            <a:spAutoFit/>
+          </a:bodyPr>
+          <a:lstStyle/>
+          <a:p>
+            <a:pPr>
+              <a:spcAft>
+                <a:spcPts val="600"/>
+              </a:spcAft>
+            </a:pPr>
+            <a:r>
+              <a:rPr sz="1500">
+                <a:solidFill>
+                  <a:srgbClr val="22282E"/>
+                </a:solidFill>
+              </a:rPr>
+              <a:t>•  ❓ ¿NIST CSF es obligatorio? No, es voluntario, pero se ha convertido en un lenguaje común y en muchos sectores o países es de facto exigido por contratos o reguladores. Su adopción suele ser una…</a:t>
+            </a:r>
+          </a:p>
+          <a:p>
+            <a:pPr>
+              <a:spcAft>
+                <a:spcPts val="600"/>
+              </a:spcAft>
+            </a:pPr>
+            <a:r>
+              <a:rPr sz="1500">
+                <a:solidFill>
+                  <a:srgbClr val="22282E"/>
+                </a:solidFill>
+              </a:rPr>
+              <a:t>•  ❓ ¿ATT&amp;CK sustituye a la Kill Chain? No; ATT&amp;CK detalla técnicas concretas y la Kill Chain da la vista macro por fases. Se usan juntas: la Kill Chain para razonar dónde cortar, ATT&amp;CK para saber con…</a:t>
+            </a:r>
+          </a:p>
+          <a:p>
+            <a:pPr>
+              <a:spcAft>
+                <a:spcPts val="600"/>
+              </a:spcAft>
+            </a:pPr>
+            <a:r>
+              <a:rPr sz="1500">
+                <a:solidFill>
+                  <a:srgbClr val="22282E"/>
+                </a:solidFill>
+              </a:rPr>
+              <a:t>•  ❓ ¿Puedo usar solo ATT&amp;CK sin marcos de gestión? Para operaciones defensivas ayuda mucho, pero sin CSF o ISO faltaría la capa de gobernanza, priorización de riesgo y cumplimiento que decide dónde…</a:t>
+            </a:r>
+          </a:p>
+          <a:p>
+            <a:pPr>
+              <a:spcAft>
+                <a:spcPts val="600"/>
+              </a:spcAft>
+            </a:pPr>
+            <a:r>
+              <a:rPr sz="1500">
+                <a:solidFill>
+                  <a:srgbClr val="22282E"/>
+                </a:solidFill>
+              </a:rPr>
+              <a:t>•  ❓ ¿El Diamond Model es solo para forense? No; es útil en análisis de intrusiones y threat intelligence, no solo tras el incidente. Su capacidad de pivote ayuda a correlacionar campañas y a descubrir…</a:t>
+            </a:r>
+          </a:p>
+          <a:p>
+            <a:pPr>
+              <a:spcAft>
+                <a:spcPts val="600"/>
+              </a:spcAft>
+            </a:pPr>
+            <a:r>
+              <a:rPr sz="1500">
+                <a:solidFill>
+                  <a:srgbClr val="22282E"/>
+                </a:solidFill>
+              </a:rPr>
+              <a:t>•  ❓ ¿Por dónde empiezo si mi organización no tiene nada? Por Govern e Identify del CSF: entender el contexto, los activos y los riesgos. Sin ese mapa, cualquier control que compres será a ciegas, y los…</a:t>
+            </a:r>
+          </a:p>
+        </p:txBody>
+      </p:sp>
+    </p:spTree>
+  </p:cSld>
+  <p:clrMapOvr>
+    <a:masterClrMapping/>
+  </p:clrMapOvr>
+</p:sld>
+</file>
+
+<file path=ppt/slides/slide14.xml><?xml version="1.0" encoding="utf-8"?>
+<p:sld xmlns:a="http://schemas.openxmlformats.org/drawingml/2006/main" xmlns:p="http://schemas.openxmlformats.org/presentationml/2006/main" xmlns:r="http://schemas.openxmlformats.org/officeDocument/2006/relationships">
+  <p:cSld>
+    <p:spTree>
+      <p:nvGrpSpPr>
+        <p:cNvPr id="1" name=""/>
+        <p:cNvGrpSpPr/>
+        <p:nvPr/>
+      </p:nvGrpSpPr>
+      <p:grpSpPr/>
+      <p:sp>
+        <p:nvSpPr>
+          <p:cNvPr id="2" name="TextBox 1"/>
+          <p:cNvSpPr txBox="1"/>
+          <p:nvPr/>
+        </p:nvSpPr>
+        <p:spPr>
+          <a:xfrm>
+            <a:off x="457200" y="320040"/>
+            <a:ext cx="8229600" cy="822960"/>
+          </a:xfrm>
+          <a:prstGeom prst="rect">
+            <a:avLst/>
+          </a:prstGeom>
+          <a:noFill/>
+        </p:spPr>
+        <p:txBody>
+          <a:bodyPr wrap="square">
+            <a:spAutoFit/>
+          </a:bodyPr>
+          <a:lstStyle/>
+          <a:p>
+            <a:r>
+              <a:rPr sz="2600" b="1">
+                <a:solidFill>
+                  <a:srgbClr val="0B3D2E"/>
+                </a:solidFill>
+              </a:rPr>
+              <a:t>🔗 Referencias</a:t>
+            </a:r>
+          </a:p>
+        </p:txBody>
+      </p:sp>
+      <p:sp>
+        <p:nvSpPr>
+          <p:cNvPr id="3" name="TextBox 2"/>
+          <p:cNvSpPr txBox="1"/>
+          <p:nvPr/>
+        </p:nvSpPr>
+        <p:spPr>
+          <a:xfrm>
+            <a:off x="457200" y="1280160"/>
+            <a:ext cx="8229600" cy="4937760"/>
+          </a:xfrm>
+          <a:prstGeom prst="rect">
+            <a:avLst/>
+          </a:prstGeom>
+          <a:noFill/>
+        </p:spPr>
+        <p:txBody>
+          <a:bodyPr wrap="square">
+            <a:spAutoFit/>
+          </a:bodyPr>
+          <a:lstStyle/>
+          <a:p>
+            <a:pPr>
+              <a:spcAft>
+                <a:spcPts val="600"/>
+              </a:spcAft>
+            </a:pPr>
+            <a:r>
+              <a:rPr sz="1500">
+                <a:solidFill>
+                  <a:srgbClr val="22282E"/>
+                </a:solidFill>
+              </a:rPr>
+              <a:t>•  NIST Cybersecurity Framework 2.0 — &lt;https://www.nist.gov/cyberframework&gt;</a:t>
             </a:r>
           </a:p>
           <a:p>
@@ -3549,26 +3867,251 @@
                   <a:srgbClr val="22282E"/>
                 </a:solidFill>
               </a:rPr>
-              <a:t>•  MITRE ATT&amp;CK y Navigator — &lt;https://attack.mitre.org/&gt;</a:t>
-            </a:r>
-          </a:p>
-          <a:p>
-            <a:pPr>
-              <a:spcAft>
-                <a:spcPts val="600"/>
-              </a:spcAft>
-            </a:pPr>
-            <a:r>
-              <a:rPr sz="1500">
-                <a:solidFill>
-                  <a:srgbClr val="22282E"/>
-                </a:solidFill>
-              </a:rPr>
-              <a:t>•  Caltagirone, Pendergast &amp; Betz, The Diamond Model of Intrusion Analysis — &lt;https://www.activeresponse.org/the-diamond-model/&gt;</a:t>
-            </a:r>
-          </a:p>
-        </p:txBody>
-      </p:sp>
+              <a:t>•  MITRE ATT&amp;CK y ATT&amp;CK Navigator — &lt;https://attack.mitre.org/&gt;</a:t>
+            </a:r>
+          </a:p>
+          <a:p>
+            <a:pPr>
+              <a:spcAft>
+                <a:spcPts val="600"/>
+              </a:spcAft>
+            </a:pPr>
+            <a:r>
+              <a:rPr sz="1500">
+                <a:solidFill>
+                  <a:srgbClr val="22282E"/>
+                </a:solidFill>
+              </a:rPr>
+              <a:t>•  Caltagirone, Pendergast y Betz, The Diamond Model of Intrusion Analysis — &lt;https://www.activeresponse.org/the-diamond-model/&gt;</a:t>
+            </a:r>
+          </a:p>
+        </p:txBody>
+      </p:sp>
+    </p:spTree>
+  </p:cSld>
+  <p:clrMapOvr>
+    <a:masterClrMapping/>
+  </p:clrMapOvr>
+</p:sld>
+</file>
+
+<file path=ppt/slides/slide15.xml><?xml version="1.0" encoding="utf-8"?>
+<p:sld xmlns:a="http://schemas.openxmlformats.org/drawingml/2006/main" xmlns:p="http://schemas.openxmlformats.org/presentationml/2006/main" xmlns:r="http://schemas.openxmlformats.org/officeDocument/2006/relationships">
+  <p:cSld>
+    <p:spTree>
+      <p:nvGrpSpPr>
+        <p:cNvPr id="1" name=""/>
+        <p:cNvGrpSpPr/>
+        <p:nvPr/>
+      </p:nvGrpSpPr>
+      <p:grpSpPr/>
+      <p:sp>
+        <p:nvSpPr>
+          <p:cNvPr id="2" name="TextBox 1"/>
+          <p:cNvSpPr txBox="1"/>
+          <p:nvPr/>
+        </p:nvSpPr>
+        <p:spPr>
+          <a:xfrm>
+            <a:off x="457200" y="274320"/>
+            <a:ext cx="8229600" cy="640080"/>
+          </a:xfrm>
+          <a:prstGeom prst="rect">
+            <a:avLst/>
+          </a:prstGeom>
+          <a:noFill/>
+        </p:spPr>
+        <p:txBody>
+          <a:bodyPr wrap="square">
+            <a:spAutoFit/>
+          </a:bodyPr>
+          <a:lstStyle/>
+          <a:p>
+            <a:r>
+              <a:rPr sz="2200" b="1">
+                <a:solidFill>
+                  <a:srgbClr val="0B3D2E"/>
+                </a:solidFill>
+              </a:rPr>
+              <a:t>Diagrama 1</a:t>
+            </a:r>
+          </a:p>
+        </p:txBody>
+      </p:sp>
+      <p:pic>
+        <p:nvPicPr>
+          <p:cNvPr id="3" name="Picture 2" descr="fc8bd3af4828f694.png"/>
+          <p:cNvPicPr>
+            <a:picLocks noChangeAspect="1"/>
+          </p:cNvPicPr>
+          <p:nvPr/>
+        </p:nvPicPr>
+        <p:blipFill>
+          <a:blip r:embed="rId2"/>
+          <a:stretch>
+            <a:fillRect/>
+          </a:stretch>
+        </p:blipFill>
+        <p:spPr>
+          <a:xfrm>
+            <a:off x="3037170" y="1097280"/>
+            <a:ext cx="3069659" cy="5303520"/>
+          </a:xfrm>
+          <a:prstGeom prst="rect">
+            <a:avLst/>
+          </a:prstGeom>
+        </p:spPr>
+      </p:pic>
+    </p:spTree>
+  </p:cSld>
+  <p:clrMapOvr>
+    <a:masterClrMapping/>
+  </p:clrMapOvr>
+</p:sld>
+</file>
+
+<file path=ppt/slides/slide16.xml><?xml version="1.0" encoding="utf-8"?>
+<p:sld xmlns:a="http://schemas.openxmlformats.org/drawingml/2006/main" xmlns:p="http://schemas.openxmlformats.org/presentationml/2006/main" xmlns:r="http://schemas.openxmlformats.org/officeDocument/2006/relationships">
+  <p:cSld>
+    <p:spTree>
+      <p:nvGrpSpPr>
+        <p:cNvPr id="1" name=""/>
+        <p:cNvGrpSpPr/>
+        <p:nvPr/>
+      </p:nvGrpSpPr>
+      <p:grpSpPr/>
+      <p:sp>
+        <p:nvSpPr>
+          <p:cNvPr id="2" name="TextBox 1"/>
+          <p:cNvSpPr txBox="1"/>
+          <p:nvPr/>
+        </p:nvSpPr>
+        <p:spPr>
+          <a:xfrm>
+            <a:off x="457200" y="274320"/>
+            <a:ext cx="8229600" cy="640080"/>
+          </a:xfrm>
+          <a:prstGeom prst="rect">
+            <a:avLst/>
+          </a:prstGeom>
+          <a:noFill/>
+        </p:spPr>
+        <p:txBody>
+          <a:bodyPr wrap="square">
+            <a:spAutoFit/>
+          </a:bodyPr>
+          <a:lstStyle/>
+          <a:p>
+            <a:r>
+              <a:rPr sz="2200" b="1">
+                <a:solidFill>
+                  <a:srgbClr val="0B3D2E"/>
+                </a:solidFill>
+              </a:rPr>
+              <a:t>Diagrama 2</a:t>
+            </a:r>
+          </a:p>
+        </p:txBody>
+      </p:sp>
+      <p:pic>
+        <p:nvPicPr>
+          <p:cNvPr id="3" name="Picture 2" descr="a257e38be6406843.png"/>
+          <p:cNvPicPr>
+            <a:picLocks noChangeAspect="1"/>
+          </p:cNvPicPr>
+          <p:nvPr/>
+        </p:nvPicPr>
+        <p:blipFill>
+          <a:blip r:embed="rId2"/>
+          <a:stretch>
+            <a:fillRect/>
+          </a:stretch>
+        </p:blipFill>
+        <p:spPr>
+          <a:xfrm>
+            <a:off x="457200" y="3076956"/>
+            <a:ext cx="8229600" cy="1344168"/>
+          </a:xfrm>
+          <a:prstGeom prst="rect">
+            <a:avLst/>
+          </a:prstGeom>
+        </p:spPr>
+      </p:pic>
+    </p:spTree>
+  </p:cSld>
+  <p:clrMapOvr>
+    <a:masterClrMapping/>
+  </p:clrMapOvr>
+</p:sld>
+</file>
+
+<file path=ppt/slides/slide17.xml><?xml version="1.0" encoding="utf-8"?>
+<p:sld xmlns:a="http://schemas.openxmlformats.org/drawingml/2006/main" xmlns:p="http://schemas.openxmlformats.org/presentationml/2006/main" xmlns:r="http://schemas.openxmlformats.org/officeDocument/2006/relationships">
+  <p:cSld>
+    <p:spTree>
+      <p:nvGrpSpPr>
+        <p:cNvPr id="1" name=""/>
+        <p:cNvGrpSpPr/>
+        <p:nvPr/>
+      </p:nvGrpSpPr>
+      <p:grpSpPr/>
+      <p:sp>
+        <p:nvSpPr>
+          <p:cNvPr id="2" name="TextBox 1"/>
+          <p:cNvSpPr txBox="1"/>
+          <p:nvPr/>
+        </p:nvSpPr>
+        <p:spPr>
+          <a:xfrm>
+            <a:off x="457200" y="274320"/>
+            <a:ext cx="8229600" cy="640080"/>
+          </a:xfrm>
+          <a:prstGeom prst="rect">
+            <a:avLst/>
+          </a:prstGeom>
+          <a:noFill/>
+        </p:spPr>
+        <p:txBody>
+          <a:bodyPr wrap="square">
+            <a:spAutoFit/>
+          </a:bodyPr>
+          <a:lstStyle/>
+          <a:p>
+            <a:r>
+              <a:rPr sz="2200" b="1">
+                <a:solidFill>
+                  <a:srgbClr val="0B3D2E"/>
+                </a:solidFill>
+              </a:rPr>
+              <a:t>Diagrama 3</a:t>
+            </a:r>
+          </a:p>
+        </p:txBody>
+      </p:sp>
+      <p:pic>
+        <p:nvPicPr>
+          <p:cNvPr id="3" name="Picture 2" descr="13709b6d5144a8ec.png"/>
+          <p:cNvPicPr>
+            <a:picLocks noChangeAspect="1"/>
+          </p:cNvPicPr>
+          <p:nvPr/>
+        </p:nvPicPr>
+        <p:blipFill>
+          <a:blip r:embed="rId2"/>
+          <a:stretch>
+            <a:fillRect/>
+          </a:stretch>
+        </p:blipFill>
+        <p:spPr>
+          <a:xfrm>
+            <a:off x="889698" y="1097280"/>
+            <a:ext cx="7364603" cy="5303520"/>
+          </a:xfrm>
+          <a:prstGeom prst="rect">
+            <a:avLst/>
+          </a:prstGeom>
+        </p:spPr>
+      </p:pic>
     </p:spTree>
   </p:cSld>
   <p:clrMapOvr>
@@ -3653,7 +4196,7 @@
                   <a:srgbClr val="22282E"/>
                 </a:solidFill>
               </a:rPr>
-              <a:t>•  Conocer los marcos que estructuran la práctica profesional de la ciberseguridad y saber cuándo usar cada uno. Al terminar podrás ubicar cualquier control o técnica dentro de un framework, entender la diferencia entre un marco de gestión (CSF, ISO) y un marco de conocimiento adversario (ATT&amp;CK, Diamond), y usarlos juntos.</a:t>
+              <a:t>•  Conocer los marcos que estructuran la práctica profesional de la ciberseguridad y saber cuándo usar cada uno. Los frameworks no son burocracia: son lenguajes compartidos que permiten a una…</a:t>
             </a:r>
           </a:p>
         </p:txBody>
@@ -3820,6 +4363,21 @@
               <a:t>•  Combinar un marco de gestión con uno adversario en un caso real.</a:t>
             </a:r>
           </a:p>
+          <a:p>
+            <a:pPr>
+              <a:spcAft>
+                <a:spcPts val="600"/>
+              </a:spcAft>
+            </a:pPr>
+            <a:r>
+              <a:rPr sz="1500">
+                <a:solidFill>
+                  <a:srgbClr val="22282E"/>
+                </a:solidFill>
+              </a:rPr>
+              <a:t>•  Distinguir cumplimiento de seguridad efectiva y explicar por qué certificar no equivale a estar protegido.</a:t>
+            </a:r>
+          </a:p>
         </p:txBody>
       </p:sp>
     </p:spTree>
@@ -4047,7 +4605,7 @@
                   <a:srgbClr val="0B3D2E"/>
                 </a:solidFill>
               </a:rPr>
-              <a:t>📖 Definiciones y características</a:t>
+              <a:t>🧠 Explicación en profundidad</a:t>
             </a:r>
           </a:p>
         </p:txBody>
@@ -4085,82 +4643,97 @@
                   <a:srgbClr val="22282E"/>
                 </a:solidFill>
               </a:rPr>
-              <a:t>•  NIST CSF 2.0: marco voluntario de gestión de riesgo con seis funciones (Govern, Identify, Protect, Detect, Respond, Recover). Clave: agnóstico de tecnología, orientado a resultados.</a:t>
-            </a:r>
-          </a:p>
-          <a:p>
-            <a:pPr>
-              <a:spcAft>
-                <a:spcPts val="600"/>
-              </a:spcAft>
-            </a:pPr>
-            <a:r>
-              <a:rPr sz="1500">
-                <a:solidFill>
-                  <a:srgbClr val="22282E"/>
-                </a:solidFill>
-              </a:rPr>
-              <a:t>•  SGSI: Sistema de Gestión de Seguridad de la Información, el objeto de ISO 27001. Clave: enfoque de mejora continua (PDCA).</a:t>
-            </a:r>
-          </a:p>
-          <a:p>
-            <a:pPr>
-              <a:spcAft>
-                <a:spcPts val="600"/>
-              </a:spcAft>
-            </a:pPr>
-            <a:r>
-              <a:rPr sz="1500">
-                <a:solidFill>
-                  <a:srgbClr val="22282E"/>
-                </a:solidFill>
-              </a:rPr>
-              <a:t>•  Anexo A / ISO 27002: catálogo de 93 controles (versión 2022) agrupados en 4 temas. Clave: es referencia, no obligación total; se seleccionan según riesgo.</a:t>
-            </a:r>
-          </a:p>
-          <a:p>
-            <a:pPr>
-              <a:spcAft>
-                <a:spcPts val="600"/>
-              </a:spcAft>
-            </a:pPr>
-            <a:r>
-              <a:rPr sz="1500">
-                <a:solidFill>
-                  <a:srgbClr val="22282E"/>
-                </a:solidFill>
-              </a:rPr>
-              <a:t>•  MITRE ATT&amp;CK: matriz de tácticas (el porqué) y técnicas (el cómo) del adversario. Clave: basada en observaciones reales.</a:t>
-            </a:r>
-          </a:p>
-          <a:p>
-            <a:pPr>
-              <a:spcAft>
-                <a:spcPts val="600"/>
-              </a:spcAft>
-            </a:pPr>
-            <a:r>
-              <a:rPr sz="1500">
-                <a:solidFill>
-                  <a:srgbClr val="22282E"/>
-                </a:solidFill>
-              </a:rPr>
-              <a:t>•  Diamond Model: modelo que relaciona adversario, capacidad, infraestructura y víctima en cada evento de intrusión. Clave: pivota entre vértices para descubrir más del ataque.</a:t>
-            </a:r>
-          </a:p>
-          <a:p>
-            <a:pPr>
-              <a:spcAft>
-                <a:spcPts val="600"/>
-              </a:spcAft>
-            </a:pPr>
-            <a:r>
-              <a:rPr sz="1500">
-                <a:solidFill>
-                  <a:srgbClr val="22282E"/>
-                </a:solidFill>
-              </a:rPr>
-              <a:t>•  Perfil (CSF): fotografía del estado actual vs. objetivo de las funciones del marco. Clave: herramienta de priorización.</a:t>
+              <a:t>•  El error más común al empezar con frameworks es tratarlos como si compitieran o como si uno pudiera sustituir a otro. No es así: pertenecen a familias que resuelven problemas diferentes. Los marcos…</a:t>
+            </a:r>
+          </a:p>
+          <a:p>
+            <a:pPr>
+              <a:spcAft>
+                <a:spcPts val="600"/>
+              </a:spcAft>
+            </a:pPr>
+            <a:r>
+              <a:rPr sz="1500">
+                <a:solidFill>
+                  <a:srgbClr val="22282E"/>
+                </a:solidFill>
+              </a:rPr>
+              <a:t>•  El Cybersecurity Framework del NIST organiza toda la actividad de seguridad en un puñado de funciones de alto nivel, cada una con categorías y subcategorías. En la versión 2.0, publicada en 2024, son…</a:t>
+            </a:r>
+          </a:p>
+          <a:p>
+            <a:pPr>
+              <a:spcAft>
+                <a:spcPts val="600"/>
+              </a:spcAft>
+            </a:pPr>
+            <a:r>
+              <a:rPr sz="1500">
+                <a:solidFill>
+                  <a:srgbClr val="22282E"/>
+                </a:solidFill>
+              </a:rPr>
+              <a:t>•  Para medir dónde está una organización y a dónde quiere llegar, el CSF ofrece dos herramientas. Los Tiers (niveles del 1 al 4: Parcial, Informado por riesgo, Repetible, Adaptativo) describen la…</a:t>
+            </a:r>
+          </a:p>
+          <a:p>
+            <a:pPr>
+              <a:spcAft>
+                <a:spcPts val="600"/>
+              </a:spcAft>
+            </a:pPr>
+            <a:r>
+              <a:rPr sz="1500">
+                <a:solidFill>
+                  <a:srgbClr val="22282E"/>
+                </a:solidFill>
+              </a:rPr>
+              <a:t>•  Mientras el CSF es voluntario y orientado a resultados, ISO/IEC 27001 es un estándar internacional certificable que define los requisitos de un SGSI (Sistema de Gestión de Seguridad de la…</a:t>
+            </a:r>
+          </a:p>
+          <a:p>
+            <a:pPr>
+              <a:spcAft>
+                <a:spcPts val="600"/>
+              </a:spcAft>
+            </a:pPr>
+            <a:r>
+              <a:rPr sz="1500">
+                <a:solidFill>
+                  <a:srgbClr val="22282E"/>
+                </a:solidFill>
+              </a:rPr>
+              <a:t>•  MITRE ATT&amp;CK es una base de conocimiento del comportamiento adversario construida a partir de observaciones reales. Se estructura en dos niveles clave: las tácticas son el porqué, el objetivo que…</a:t>
+            </a:r>
+          </a:p>
+          <a:p>
+            <a:pPr>
+              <a:spcAft>
+                <a:spcPts val="600"/>
+              </a:spcAft>
+            </a:pPr>
+            <a:r>
+              <a:rPr sz="1500">
+                <a:solidFill>
+                  <a:srgbClr val="22282E"/>
+                </a:solidFill>
+              </a:rPr>
+              <a:t>•  El Diamond Model modela cada evento de intrusión como un rombo con cuatro vértices relacionados: adversario (quién), capacidad (con qué: malware, exploit, herramienta), infraestructura (desde dónde…</a:t>
+            </a:r>
+          </a:p>
+          <a:p>
+            <a:pPr>
+              <a:spcAft>
+                <a:spcPts val="600"/>
+              </a:spcAft>
+            </a:pPr>
+            <a:r>
+              <a:rPr sz="1500">
+                <a:solidFill>
+                  <a:srgbClr val="22282E"/>
+                </a:solidFill>
+              </a:rPr>
+              <a:t>•  La potencia del modelo está en el pivote: conocido un vértice se descubren los</a:t>
             </a:r>
           </a:p>
         </p:txBody>
@@ -4211,7 +4784,7 @@
                   <a:srgbClr val="0B3D2E"/>
                 </a:solidFill>
               </a:rPr>
-              <a:t>🧰 Herramientas y preparación</a:t>
+              <a:t>📖 Definiciones y características</a:t>
             </a:r>
           </a:p>
         </p:txBody>
@@ -4249,7 +4822,97 @@
                   <a:srgbClr val="22282E"/>
                 </a:solidFill>
               </a:rPr>
-              <a:t>•  Descarga el NIST CSF 2.0 (PDF gratuito). Explora la matriz de MITRE ATT&amp;CK en el navegador, incluido el ATT&amp;CK Navigator (&lt;https://mitre-attack.github.io/attack-navigator/&gt;) para crear heatmaps. Para ISO, consulta el índice público del Anexo A. Opcional: hoja de cálculo para mapeos. Sin laboratorio ofensivo.</a:t>
+              <a:t>•  NIST CSF 2.0: marco voluntario de gestión de riesgo con seis funciones (Govern, Identify, Protect, Detect, Respond, Recover). Es agnóstico de tecnología y orientado a resultados, lo que lo hace un…</a:t>
+            </a:r>
+          </a:p>
+          <a:p>
+            <a:pPr>
+              <a:spcAft>
+                <a:spcPts val="600"/>
+              </a:spcAft>
+            </a:pPr>
+            <a:r>
+              <a:rPr sz="1500">
+                <a:solidFill>
+                  <a:srgbClr val="22282E"/>
+                </a:solidFill>
+              </a:rPr>
+              <a:t>•  Funciones del CSF: los seis grandes agrupadores de actividad. Govern es la novedad de la 2.0 y aporta el contexto, los roles y las decisiones de riesgo que sostienen a las otras cinco.</a:t>
+            </a:r>
+          </a:p>
+          <a:p>
+            <a:pPr>
+              <a:spcAft>
+                <a:spcPts val="600"/>
+              </a:spcAft>
+            </a:pPr>
+            <a:r>
+              <a:rPr sz="1500">
+                <a:solidFill>
+                  <a:srgbClr val="22282E"/>
+                </a:solidFill>
+              </a:rPr>
+              <a:t>•  Tiers: cuatro niveles (Parcial, Informado por riesgo, Repetible, Adaptativo) que describen la madurez del proceso de gestión de riesgo, no la cantidad de controles.</a:t>
+            </a:r>
+          </a:p>
+          <a:p>
+            <a:pPr>
+              <a:spcAft>
+                <a:spcPts val="600"/>
+              </a:spcAft>
+            </a:pPr>
+            <a:r>
+              <a:rPr sz="1500">
+                <a:solidFill>
+                  <a:srgbClr val="22282E"/>
+                </a:solidFill>
+              </a:rPr>
+              <a:t>•  Perfil (CSF): fotografía del estado actual frente al objetivo a lo largo de las funciones. La brecha entre ambos perfiles es la lista priorizada de trabajo pendiente.</a:t>
+            </a:r>
+          </a:p>
+          <a:p>
+            <a:pPr>
+              <a:spcAft>
+                <a:spcPts val="600"/>
+              </a:spcAft>
+            </a:pPr>
+            <a:r>
+              <a:rPr sz="1500">
+                <a:solidFill>
+                  <a:srgbClr val="22282E"/>
+                </a:solidFill>
+              </a:rPr>
+              <a:t>•  SGSI: Sistema de Gestión de Seguridad de la Información, objeto de ISO/IEC 27001. Se basa en la mejora continua (PDCA) sobre riesgos evaluados.</a:t>
+            </a:r>
+          </a:p>
+          <a:p>
+            <a:pPr>
+              <a:spcAft>
+                <a:spcPts val="600"/>
+              </a:spcAft>
+            </a:pPr>
+            <a:r>
+              <a:rPr sz="1500">
+                <a:solidFill>
+                  <a:srgbClr val="22282E"/>
+                </a:solidFill>
+              </a:rPr>
+              <a:t>•  ISO/IEC 27001: estándar internacional certificable que define los requisitos del SGSI. Certificar demuestra que hay proceso, no que se esté a salvo de toda amenaza.</a:t>
+            </a:r>
+          </a:p>
+          <a:p>
+            <a:pPr>
+              <a:spcAft>
+                <a:spcPts val="600"/>
+              </a:spcAft>
+            </a:pPr>
+            <a:r>
+              <a:rPr sz="1500">
+                <a:solidFill>
+                  <a:srgbClr val="22282E"/>
+                </a:solidFill>
+              </a:rPr>
+              <a:t>•  Anexo A / ISO 27002: catálogo de 93 controles de referencia (versión 2022) en cuatro temas: organizacionales, de personas, físicos y tecnológicos. Se seleccionan según riesgo, no en bloque.</a:t>
             </a:r>
           </a:p>
         </p:txBody>
@@ -4300,7 +4963,7 @@
                   <a:srgbClr val="0B3D2E"/>
                 </a:solidFill>
               </a:rPr>
-              <a:t>🧪 Laboratorio guiado (ejercicio aplicado)</a:t>
+              <a:t>📔 Glosario</a:t>
             </a:r>
           </a:p>
         </p:txBody>
@@ -4338,82 +5001,97 @@
                   <a:srgbClr val="22282E"/>
                 </a:solidFill>
               </a:rPr>
-              <a:t>•  CSF: toma una organización ficticia (una clínica pequeña) y para cada una de las 6 funciones del CSF 2.0 escribe una actividad concreta que debería realizar.</a:t>
-            </a:r>
-          </a:p>
-          <a:p>
-            <a:pPr>
-              <a:spcAft>
-                <a:spcPts val="600"/>
-              </a:spcAft>
-            </a:pPr>
-            <a:r>
-              <a:rPr sz="1500">
-                <a:solidFill>
-                  <a:srgbClr val="22282E"/>
-                </a:solidFill>
-              </a:rPr>
-              <a:t>•  Perfil actual vs. objetivo: asigna a cada función un nivel del 1 al 4 (actual) y otro (deseado). Identifica la mayor brecha.</a:t>
-            </a:r>
-          </a:p>
-          <a:p>
-            <a:pPr>
-              <a:spcAft>
-                <a:spcPts val="600"/>
-              </a:spcAft>
-            </a:pPr>
-            <a:r>
-              <a:rPr sz="1500">
-                <a:solidFill>
-                  <a:srgbClr val="22282E"/>
-                </a:solidFill>
-              </a:rPr>
-              <a:t>•  ISO mapeo: selecciona 5 controles del Anexo A relevantes para esa clínica y justifica cada uno con un riesgo.</a:t>
-            </a:r>
-          </a:p>
-          <a:p>
-            <a:pPr>
-              <a:spcAft>
-                <a:spcPts val="600"/>
-              </a:spcAft>
-            </a:pPr>
-            <a:r>
-              <a:rPr sz="1500">
-                <a:solidFill>
-                  <a:srgbClr val="22282E"/>
-                </a:solidFill>
-              </a:rPr>
-              <a:t>•  ATT&amp;CK Navigator: crea una capa marcando 5 técnicas que un ransomware usaría contra la clínica. Exporta el JSON.</a:t>
-            </a:r>
-          </a:p>
-          <a:p>
-            <a:pPr>
-              <a:spcAft>
-                <a:spcPts val="600"/>
-              </a:spcAft>
-            </a:pPr>
-            <a:r>
-              <a:rPr sz="1500">
-                <a:solidFill>
-                  <a:srgbClr val="22282E"/>
-                </a:solidFill>
-              </a:rPr>
-              <a:t>•  Diamond: para un evento hipotético (correo malicioso a la recepcionista), rellena los 4 vértices: adversario, capacidad (el malware), infraestructura (dominio/IP), víctima.</a:t>
-            </a:r>
-          </a:p>
-          <a:p>
-            <a:pPr>
-              <a:spcAft>
-                <a:spcPts val="600"/>
-              </a:spcAft>
-            </a:pPr>
-            <a:r>
-              <a:rPr sz="1500">
-                <a:solidFill>
-                  <a:srgbClr val="22282E"/>
-                </a:solidFill>
-              </a:rPr>
-              <a:t>•  Integración: muestra cómo una técnica de ATT&amp;CK detectada se conecta con una función del CSF (Detect) y con un control ISO.</a:t>
+              <a:t>•  Término — Definición concisa</a:t>
+            </a:r>
+          </a:p>
+          <a:p>
+            <a:pPr>
+              <a:spcAft>
+                <a:spcPts val="600"/>
+              </a:spcAft>
+            </a:pPr>
+            <a:r>
+              <a:rPr sz="1500">
+                <a:solidFill>
+                  <a:srgbClr val="22282E"/>
+                </a:solidFill>
+              </a:rPr>
+              <a:t>•  NIST CSF — Cybersecurity Framework del NIST, marco voluntario de gestión de riesgo</a:t>
+            </a:r>
+          </a:p>
+          <a:p>
+            <a:pPr>
+              <a:spcAft>
+                <a:spcPts val="600"/>
+              </a:spcAft>
+            </a:pPr>
+            <a:r>
+              <a:rPr sz="1500">
+                <a:solidFill>
+                  <a:srgbClr val="22282E"/>
+                </a:solidFill>
+              </a:rPr>
+              <a:t>•  Govern — Función de gobernanza, novedad del CSF 2.0</a:t>
+            </a:r>
+          </a:p>
+          <a:p>
+            <a:pPr>
+              <a:spcAft>
+                <a:spcPts val="600"/>
+              </a:spcAft>
+            </a:pPr>
+            <a:r>
+              <a:rPr sz="1500">
+                <a:solidFill>
+                  <a:srgbClr val="22282E"/>
+                </a:solidFill>
+              </a:rPr>
+              <a:t>•  Tier — Nivel de madurez del proceso de gestión de riesgo (1 a 4)</a:t>
+            </a:r>
+          </a:p>
+          <a:p>
+            <a:pPr>
+              <a:spcAft>
+                <a:spcPts val="600"/>
+              </a:spcAft>
+            </a:pPr>
+            <a:r>
+              <a:rPr sz="1500">
+                <a:solidFill>
+                  <a:srgbClr val="22282E"/>
+                </a:solidFill>
+              </a:rPr>
+              <a:t>•  Perfil — Estado actual frente a objetivo en las funciones del CSF</a:t>
+            </a:r>
+          </a:p>
+          <a:p>
+            <a:pPr>
+              <a:spcAft>
+                <a:spcPts val="600"/>
+              </a:spcAft>
+            </a:pPr>
+            <a:r>
+              <a:rPr sz="1500">
+                <a:solidFill>
+                  <a:srgbClr val="22282E"/>
+                </a:solidFill>
+              </a:rPr>
+              <a:t>•  SGSI / ISMS — Sistema de Gestión de Seguridad de la Información</a:t>
+            </a:r>
+          </a:p>
+          <a:p>
+            <a:pPr>
+              <a:spcAft>
+                <a:spcPts val="600"/>
+              </a:spcAft>
+            </a:pPr>
+            <a:r>
+              <a:rPr sz="1500">
+                <a:solidFill>
+                  <a:srgbClr val="22282E"/>
+                </a:solidFill>
+              </a:rPr>
+              <a:t>•  ISO 27001 — Estándar certificable de requisitos del SGSI</a:t>
             </a:r>
           </a:p>
         </p:txBody>
@@ -4464,7 +5142,7 @@
                   <a:srgbClr val="0B3D2E"/>
                 </a:solidFill>
               </a:rPr>
-              <a:t>✍️ Ejercicios</a:t>
+              <a:t>🧰 Herramientas y preparación</a:t>
             </a:r>
           </a:p>
         </p:txBody>
@@ -4502,82 +5180,7 @@
                   <a:srgbClr val="22282E"/>
                 </a:solidFill>
               </a:rPr>
-              <a:t>•  ¿Qué función nueva añadió el CSF 2.0 respecto a 1.1 y por qué importa?</a:t>
-            </a:r>
-          </a:p>
-          <a:p>
-            <a:pPr>
-              <a:spcAft>
-                <a:spcPts val="600"/>
-              </a:spcAft>
-            </a:pPr>
-            <a:r>
-              <a:rPr sz="1500">
-                <a:solidFill>
-                  <a:srgbClr val="22282E"/>
-                </a:solidFill>
-              </a:rPr>
-              <a:t>•  Explica la diferencia entre una táctica y una técnica en ATT&amp;CK con un ejemplo.</a:t>
-            </a:r>
-          </a:p>
-          <a:p>
-            <a:pPr>
-              <a:spcAft>
-                <a:spcPts val="600"/>
-              </a:spcAft>
-            </a:pPr>
-            <a:r>
-              <a:rPr sz="1500">
-                <a:solidFill>
-                  <a:srgbClr val="22282E"/>
-                </a:solidFill>
-              </a:rPr>
-              <a:t>•  Da tres controles del Anexo A y clasifícalos en su tema (organizacional, personas, físico, tecnológico).</a:t>
-            </a:r>
-          </a:p>
-          <a:p>
-            <a:pPr>
-              <a:spcAft>
-                <a:spcPts val="600"/>
-              </a:spcAft>
-            </a:pPr>
-            <a:r>
-              <a:rPr sz="1500">
-                <a:solidFill>
-                  <a:srgbClr val="22282E"/>
-                </a:solidFill>
-              </a:rPr>
-              <a:t>•  Analiza un incidente sencillo con el Diamond Model y muestra un "pivote" entre dos vértices.</a:t>
-            </a:r>
-          </a:p>
-          <a:p>
-            <a:pPr>
-              <a:spcAft>
-                <a:spcPts val="600"/>
-              </a:spcAft>
-            </a:pPr>
-            <a:r>
-              <a:rPr sz="1500">
-                <a:solidFill>
-                  <a:srgbClr val="22282E"/>
-                </a:solidFill>
-              </a:rPr>
-              <a:t>•  ¿Por qué "cumplir ISO 27001" no equivale a "estar seguro"? Argumenta.</a:t>
-            </a:r>
-          </a:p>
-          <a:p>
-            <a:pPr>
-              <a:spcAft>
-                <a:spcPts val="600"/>
-              </a:spcAft>
-            </a:pPr>
-            <a:r>
-              <a:rPr sz="1500">
-                <a:solidFill>
-                  <a:srgbClr val="22282E"/>
-                </a:solidFill>
-              </a:rPr>
-              <a:t>•  Mapea una técnica ATT&amp;CK a la función del CSF que ayudaría a mitigarla.</a:t>
+              <a:t>•  Descarga el NIST CSF 2.0 (PDF gratuito desde &lt;https://www.nist.gov/cyberframework&gt;). Explora la matriz de MITRE ATT&amp;CK en el navegador y el ATT&amp;CK Navigator…</a:t>
             </a:r>
           </a:p>
         </p:txBody>
@@ -4628,7 +5231,7 @@
                   <a:srgbClr val="0B3D2E"/>
                 </a:solidFill>
               </a:rPr>
-              <a:t>📝 Reto verificable</a:t>
+              <a:t>🧪 Laboratorio guiado</a:t>
             </a:r>
           </a:p>
         </p:txBody>
@@ -4666,22 +5269,82 @@
                   <a:srgbClr val="22282E"/>
                 </a:solidFill>
               </a:rPr>
-              <a:t>•  Produce un documento que integre los cuatro marcos sobre un mismo escenario: (1) perfil CSF actual/objetivo con 6 funciones, (2) selección justificada de 8 controles del Anexo A, (3) una capa de ATT&amp;CK Navigator con ≥6 técnicas exportada como JSON, y (4) un análisis Diamond de un evento del escenario.</a:t>
-            </a:r>
-          </a:p>
-          <a:p>
-            <a:pPr>
-              <a:spcAft>
-                <a:spcPts val="600"/>
-              </a:spcAft>
-            </a:pPr>
-            <a:r>
-              <a:rPr sz="1500">
-                <a:solidFill>
-                  <a:srgbClr val="22282E"/>
-                </a:solidFill>
-              </a:rPr>
-              <a:t>•  Criterio de aceptación: el JSON del Navigator carga sin errores en la herramienta oficial, cada control ISO se vincula a un riesgo, y cada técnica ATT&amp;CK se conecta con al menos una función del CSF. El documento demuestra que gestión y conocimiento adversario se refuerzan.</a:t>
+              <a:t>•  CSF: toma una organización ficticia (una clínica pequeña) y, para cada una de las 6 funciones del CSF 2.0, escribe una actividad concreta que debería realizar.</a:t>
+            </a:r>
+          </a:p>
+          <a:p>
+            <a:pPr>
+              <a:spcAft>
+                <a:spcPts val="600"/>
+              </a:spcAft>
+            </a:pPr>
+            <a:r>
+              <a:rPr sz="1500">
+                <a:solidFill>
+                  <a:srgbClr val="22282E"/>
+                </a:solidFill>
+              </a:rPr>
+              <a:t>•  Perfil actual vs. objetivo: asigna a cada función un Tier del 1 al 4 para el estado actual y otro para el deseado. Identifica la mayor brecha y explica por qué priorizarla.</a:t>
+            </a:r>
+          </a:p>
+          <a:p>
+            <a:pPr>
+              <a:spcAft>
+                <a:spcPts val="600"/>
+              </a:spcAft>
+            </a:pPr>
+            <a:r>
+              <a:rPr sz="1500">
+                <a:solidFill>
+                  <a:srgbClr val="22282E"/>
+                </a:solidFill>
+              </a:rPr>
+              <a:t>•  ISO mapeo: selecciona 5 controles del Anexo A relevantes para esa clínica y justifica cada uno con el riesgo que mitiga, como harías en la Declaración de Aplicabilidad.</a:t>
+            </a:r>
+          </a:p>
+          <a:p>
+            <a:pPr>
+              <a:spcAft>
+                <a:spcPts val="600"/>
+              </a:spcAft>
+            </a:pPr>
+            <a:r>
+              <a:rPr sz="1500">
+                <a:solidFill>
+                  <a:srgbClr val="22282E"/>
+                </a:solidFill>
+              </a:rPr>
+              <a:t>•  ATT&amp;CK Navigator: crea una capa marcando 5 técnicas que un ransomware usaría contra la clínica, anota sus IDs y exporta el JSON.</a:t>
+            </a:r>
+          </a:p>
+          <a:p>
+            <a:pPr>
+              <a:spcAft>
+                <a:spcPts val="600"/>
+              </a:spcAft>
+            </a:pPr>
+            <a:r>
+              <a:rPr sz="1500">
+                <a:solidFill>
+                  <a:srgbClr val="22282E"/>
+                </a:solidFill>
+              </a:rPr>
+              <a:t>•  Diamond: para un evento hipotético (un correo malicioso a la recepcionista), rellena los cuatro vértices —adversario, capacidad (el malware), infraestructura (dominio/IP), víctima— y describe un…</a:t>
+            </a:r>
+          </a:p>
+          <a:p>
+            <a:pPr>
+              <a:spcAft>
+                <a:spcPts val="600"/>
+              </a:spcAft>
+            </a:pPr>
+            <a:r>
+              <a:rPr sz="1500">
+                <a:solidFill>
+                  <a:srgbClr val="22282E"/>
+                </a:solidFill>
+              </a:rPr>
+              <a:t>•  Integración: muestra cómo una técnica de ATT&amp;CK detectada se conecta con la función Detect del CSF y con un control tecnológico del Anexo A que la mitiga.</a:t>
             </a:r>
           </a:p>
         </p:txBody>
